--- a/Servlets/9.pptx
+++ b/Servlets/9.pptx
@@ -14,7 +14,6 @@
     <p:sldId id="263" r:id="rId8"/>
     <p:sldId id="264" r:id="rId9"/>
     <p:sldId id="265" r:id="rId10"/>
-    <p:sldId id="266" r:id="rId11"/>
   </p:sldIdLst>
   <p:sldSz cx="9144000" cy="6858000" type="screen4x3"/>
   <p:notesSz cx="6858000" cy="9144000"/>
@@ -113,6 +112,22 @@
       </a:defRPr>
     </a:lvl9pPr>
   </p:defaultTextStyle>
+  <p:extLst>
+    <p:ext uri="{EFAFB233-063F-42B5-8137-9DF3F51BA10A}">
+      <p15:sldGuideLst xmlns:p15="http://schemas.microsoft.com/office/powerpoint/2012/main">
+        <p15:guide id="1" orient="horz" pos="2160">
+          <p15:clr>
+            <a:srgbClr val="A4A3A4"/>
+          </p15:clr>
+        </p15:guide>
+        <p15:guide id="2" pos="2880">
+          <p15:clr>
+            <a:srgbClr val="A4A3A4"/>
+          </p15:clr>
+        </p15:guide>
+      </p15:sldGuideLst>
+    </p:ext>
+  </p:extLst>
 </p:presentation>
 </file>
 
@@ -154,10 +169,9 @@
           <a:lstStyle/>
           <a:p>
             <a:r>
-              <a:rPr lang="en-US" smtClean="0"/>
+              <a:rPr lang="en-US"/>
               <a:t>Click to edit Master title style</a:t>
             </a:r>
-            <a:endParaRPr lang="en-US"/>
           </a:p>
         </p:txBody>
       </p:sp>
@@ -273,10 +287,9 @@
           </a:lstStyle>
           <a:p>
             <a:r>
-              <a:rPr lang="en-US" smtClean="0"/>
+              <a:rPr lang="en-US"/>
               <a:t>Click to edit Master subtitle style</a:t>
             </a:r>
-            <a:endParaRPr lang="en-US"/>
           </a:p>
         </p:txBody>
       </p:sp>
@@ -298,7 +311,7 @@
             <a:fld id="{1D8BD707-D9CF-40AE-B4C6-C98DA3205C09}" type="datetimeFigureOut">
               <a:rPr lang="en-US" smtClean="0"/>
               <a:pPr/>
-              <a:t>12/12/2022</a:t>
+              <a:t>6/15/2025</a:t>
             </a:fld>
             <a:endParaRPr lang="en-US"/>
           </a:p>
@@ -388,10 +401,9 @@
           <a:lstStyle/>
           <a:p>
             <a:r>
-              <a:rPr lang="en-US" smtClean="0"/>
+              <a:rPr lang="en-US"/>
               <a:t>Click to edit Master title style</a:t>
             </a:r>
-            <a:endParaRPr lang="en-US"/>
           </a:p>
         </p:txBody>
       </p:sp>
@@ -412,38 +424,37 @@
           <a:p>
             <a:pPr lvl="0"/>
             <a:r>
-              <a:rPr lang="en-US" smtClean="0"/>
+              <a:rPr lang="en-US"/>
               <a:t>Click to edit Master text styles</a:t>
             </a:r>
           </a:p>
           <a:p>
             <a:pPr lvl="1"/>
             <a:r>
-              <a:rPr lang="en-US" smtClean="0"/>
+              <a:rPr lang="en-US"/>
               <a:t>Second level</a:t>
             </a:r>
           </a:p>
           <a:p>
             <a:pPr lvl="2"/>
             <a:r>
-              <a:rPr lang="en-US" smtClean="0"/>
+              <a:rPr lang="en-US"/>
               <a:t>Third level</a:t>
             </a:r>
           </a:p>
           <a:p>
             <a:pPr lvl="3"/>
             <a:r>
-              <a:rPr lang="en-US" smtClean="0"/>
+              <a:rPr lang="en-US"/>
               <a:t>Fourth level</a:t>
             </a:r>
           </a:p>
           <a:p>
             <a:pPr lvl="4"/>
             <a:r>
-              <a:rPr lang="en-US" smtClean="0"/>
+              <a:rPr lang="en-US"/>
               <a:t>Fifth level</a:t>
             </a:r>
-            <a:endParaRPr lang="en-US"/>
           </a:p>
         </p:txBody>
       </p:sp>
@@ -465,7 +476,7 @@
             <a:fld id="{1D8BD707-D9CF-40AE-B4C6-C98DA3205C09}" type="datetimeFigureOut">
               <a:rPr lang="en-US" smtClean="0"/>
               <a:pPr/>
-              <a:t>12/12/2022</a:t>
+              <a:t>6/15/2025</a:t>
             </a:fld>
             <a:endParaRPr lang="en-US"/>
           </a:p>
@@ -560,10 +571,9 @@
           <a:lstStyle/>
           <a:p>
             <a:r>
-              <a:rPr lang="en-US" smtClean="0"/>
+              <a:rPr lang="en-US"/>
               <a:t>Click to edit Master title style</a:t>
             </a:r>
-            <a:endParaRPr lang="en-US"/>
           </a:p>
         </p:txBody>
       </p:sp>
@@ -589,38 +599,37 @@
           <a:p>
             <a:pPr lvl="0"/>
             <a:r>
-              <a:rPr lang="en-US" smtClean="0"/>
+              <a:rPr lang="en-US"/>
               <a:t>Click to edit Master text styles</a:t>
             </a:r>
           </a:p>
           <a:p>
             <a:pPr lvl="1"/>
             <a:r>
-              <a:rPr lang="en-US" smtClean="0"/>
+              <a:rPr lang="en-US"/>
               <a:t>Second level</a:t>
             </a:r>
           </a:p>
           <a:p>
             <a:pPr lvl="2"/>
             <a:r>
-              <a:rPr lang="en-US" smtClean="0"/>
+              <a:rPr lang="en-US"/>
               <a:t>Third level</a:t>
             </a:r>
           </a:p>
           <a:p>
             <a:pPr lvl="3"/>
             <a:r>
-              <a:rPr lang="en-US" smtClean="0"/>
+              <a:rPr lang="en-US"/>
               <a:t>Fourth level</a:t>
             </a:r>
           </a:p>
           <a:p>
             <a:pPr lvl="4"/>
             <a:r>
-              <a:rPr lang="en-US" smtClean="0"/>
+              <a:rPr lang="en-US"/>
               <a:t>Fifth level</a:t>
             </a:r>
-            <a:endParaRPr lang="en-US"/>
           </a:p>
         </p:txBody>
       </p:sp>
@@ -642,7 +651,7 @@
             <a:fld id="{1D8BD707-D9CF-40AE-B4C6-C98DA3205C09}" type="datetimeFigureOut">
               <a:rPr lang="en-US" smtClean="0"/>
               <a:pPr/>
-              <a:t>12/12/2022</a:t>
+              <a:t>6/15/2025</a:t>
             </a:fld>
             <a:endParaRPr lang="en-US"/>
           </a:p>
@@ -732,10 +741,9 @@
           <a:lstStyle/>
           <a:p>
             <a:r>
-              <a:rPr lang="en-US" smtClean="0"/>
+              <a:rPr lang="en-US"/>
               <a:t>Click to edit Master title style</a:t>
             </a:r>
-            <a:endParaRPr lang="en-US"/>
           </a:p>
         </p:txBody>
       </p:sp>
@@ -756,38 +764,37 @@
           <a:p>
             <a:pPr lvl="0"/>
             <a:r>
-              <a:rPr lang="en-US" smtClean="0"/>
+              <a:rPr lang="en-US"/>
               <a:t>Click to edit Master text styles</a:t>
             </a:r>
           </a:p>
           <a:p>
             <a:pPr lvl="1"/>
             <a:r>
-              <a:rPr lang="en-US" smtClean="0"/>
+              <a:rPr lang="en-US"/>
               <a:t>Second level</a:t>
             </a:r>
           </a:p>
           <a:p>
             <a:pPr lvl="2"/>
             <a:r>
-              <a:rPr lang="en-US" smtClean="0"/>
+              <a:rPr lang="en-US"/>
               <a:t>Third level</a:t>
             </a:r>
           </a:p>
           <a:p>
             <a:pPr lvl="3"/>
             <a:r>
-              <a:rPr lang="en-US" smtClean="0"/>
+              <a:rPr lang="en-US"/>
               <a:t>Fourth level</a:t>
             </a:r>
           </a:p>
           <a:p>
             <a:pPr lvl="4"/>
             <a:r>
-              <a:rPr lang="en-US" smtClean="0"/>
+              <a:rPr lang="en-US"/>
               <a:t>Fifth level</a:t>
             </a:r>
-            <a:endParaRPr lang="en-US"/>
           </a:p>
         </p:txBody>
       </p:sp>
@@ -809,7 +816,7 @@
             <a:fld id="{1D8BD707-D9CF-40AE-B4C6-C98DA3205C09}" type="datetimeFigureOut">
               <a:rPr lang="en-US" smtClean="0"/>
               <a:pPr/>
-              <a:t>12/12/2022</a:t>
+              <a:t>6/15/2025</a:t>
             </a:fld>
             <a:endParaRPr lang="en-US"/>
           </a:p>
@@ -908,10 +915,9 @@
           </a:lstStyle>
           <a:p>
             <a:r>
-              <a:rPr lang="en-US" smtClean="0"/>
+              <a:rPr lang="en-US"/>
               <a:t>Click to edit Master title style</a:t>
             </a:r>
-            <a:endParaRPr lang="en-US"/>
           </a:p>
         </p:txBody>
       </p:sp>
@@ -1028,7 +1034,7 @@
           <a:p>
             <a:pPr lvl="0"/>
             <a:r>
-              <a:rPr lang="en-US" smtClean="0"/>
+              <a:rPr lang="en-US"/>
               <a:t>Click to edit Master text styles</a:t>
             </a:r>
           </a:p>
@@ -1052,7 +1058,7 @@
             <a:fld id="{1D8BD707-D9CF-40AE-B4C6-C98DA3205C09}" type="datetimeFigureOut">
               <a:rPr lang="en-US" smtClean="0"/>
               <a:pPr/>
-              <a:t>12/12/2022</a:t>
+              <a:t>6/15/2025</a:t>
             </a:fld>
             <a:endParaRPr lang="en-US"/>
           </a:p>
@@ -1142,10 +1148,9 @@
           <a:lstStyle/>
           <a:p>
             <a:r>
-              <a:rPr lang="en-US" smtClean="0"/>
+              <a:rPr lang="en-US"/>
               <a:t>Click to edit Master title style</a:t>
             </a:r>
-            <a:endParaRPr lang="en-US"/>
           </a:p>
         </p:txBody>
       </p:sp>
@@ -1199,38 +1204,37 @@
           <a:p>
             <a:pPr lvl="0"/>
             <a:r>
-              <a:rPr lang="en-US" smtClean="0"/>
+              <a:rPr lang="en-US"/>
               <a:t>Click to edit Master text styles</a:t>
             </a:r>
           </a:p>
           <a:p>
             <a:pPr lvl="1"/>
             <a:r>
-              <a:rPr lang="en-US" smtClean="0"/>
+              <a:rPr lang="en-US"/>
               <a:t>Second level</a:t>
             </a:r>
           </a:p>
           <a:p>
             <a:pPr lvl="2"/>
             <a:r>
-              <a:rPr lang="en-US" smtClean="0"/>
+              <a:rPr lang="en-US"/>
               <a:t>Third level</a:t>
             </a:r>
           </a:p>
           <a:p>
             <a:pPr lvl="3"/>
             <a:r>
-              <a:rPr lang="en-US" smtClean="0"/>
+              <a:rPr lang="en-US"/>
               <a:t>Fourth level</a:t>
             </a:r>
           </a:p>
           <a:p>
             <a:pPr lvl="4"/>
             <a:r>
-              <a:rPr lang="en-US" smtClean="0"/>
+              <a:rPr lang="en-US"/>
               <a:t>Fifth level</a:t>
             </a:r>
-            <a:endParaRPr lang="en-US"/>
           </a:p>
         </p:txBody>
       </p:sp>
@@ -1284,38 +1288,37 @@
           <a:p>
             <a:pPr lvl="0"/>
             <a:r>
-              <a:rPr lang="en-US" smtClean="0"/>
+              <a:rPr lang="en-US"/>
               <a:t>Click to edit Master text styles</a:t>
             </a:r>
           </a:p>
           <a:p>
             <a:pPr lvl="1"/>
             <a:r>
-              <a:rPr lang="en-US" smtClean="0"/>
+              <a:rPr lang="en-US"/>
               <a:t>Second level</a:t>
             </a:r>
           </a:p>
           <a:p>
             <a:pPr lvl="2"/>
             <a:r>
-              <a:rPr lang="en-US" smtClean="0"/>
+              <a:rPr lang="en-US"/>
               <a:t>Third level</a:t>
             </a:r>
           </a:p>
           <a:p>
             <a:pPr lvl="3"/>
             <a:r>
-              <a:rPr lang="en-US" smtClean="0"/>
+              <a:rPr lang="en-US"/>
               <a:t>Fourth level</a:t>
             </a:r>
           </a:p>
           <a:p>
             <a:pPr lvl="4"/>
             <a:r>
-              <a:rPr lang="en-US" smtClean="0"/>
+              <a:rPr lang="en-US"/>
               <a:t>Fifth level</a:t>
             </a:r>
-            <a:endParaRPr lang="en-US"/>
           </a:p>
         </p:txBody>
       </p:sp>
@@ -1337,7 +1340,7 @@
             <a:fld id="{1D8BD707-D9CF-40AE-B4C6-C98DA3205C09}" type="datetimeFigureOut">
               <a:rPr lang="en-US" smtClean="0"/>
               <a:pPr/>
-              <a:t>12/12/2022</a:t>
+              <a:t>6/15/2025</a:t>
             </a:fld>
             <a:endParaRPr lang="en-US"/>
           </a:p>
@@ -1431,10 +1434,9 @@
           </a:lstStyle>
           <a:p>
             <a:r>
-              <a:rPr lang="en-US" smtClean="0"/>
+              <a:rPr lang="en-US"/>
               <a:t>Click to edit Master title style</a:t>
             </a:r>
-            <a:endParaRPr lang="en-US"/>
           </a:p>
         </p:txBody>
       </p:sp>
@@ -1497,7 +1499,7 @@
           <a:p>
             <a:pPr lvl="0"/>
             <a:r>
-              <a:rPr lang="en-US" smtClean="0"/>
+              <a:rPr lang="en-US"/>
               <a:t>Click to edit Master text styles</a:t>
             </a:r>
           </a:p>
@@ -1553,38 +1555,37 @@
           <a:p>
             <a:pPr lvl="0"/>
             <a:r>
-              <a:rPr lang="en-US" smtClean="0"/>
+              <a:rPr lang="en-US"/>
               <a:t>Click to edit Master text styles</a:t>
             </a:r>
           </a:p>
           <a:p>
             <a:pPr lvl="1"/>
             <a:r>
-              <a:rPr lang="en-US" smtClean="0"/>
+              <a:rPr lang="en-US"/>
               <a:t>Second level</a:t>
             </a:r>
           </a:p>
           <a:p>
             <a:pPr lvl="2"/>
             <a:r>
-              <a:rPr lang="en-US" smtClean="0"/>
+              <a:rPr lang="en-US"/>
               <a:t>Third level</a:t>
             </a:r>
           </a:p>
           <a:p>
             <a:pPr lvl="3"/>
             <a:r>
-              <a:rPr lang="en-US" smtClean="0"/>
+              <a:rPr lang="en-US"/>
               <a:t>Fourth level</a:t>
             </a:r>
           </a:p>
           <a:p>
             <a:pPr lvl="4"/>
             <a:r>
-              <a:rPr lang="en-US" smtClean="0"/>
+              <a:rPr lang="en-US"/>
               <a:t>Fifth level</a:t>
             </a:r>
-            <a:endParaRPr lang="en-US"/>
           </a:p>
         </p:txBody>
       </p:sp>
@@ -1647,7 +1648,7 @@
           <a:p>
             <a:pPr lvl="0"/>
             <a:r>
-              <a:rPr lang="en-US" smtClean="0"/>
+              <a:rPr lang="en-US"/>
               <a:t>Click to edit Master text styles</a:t>
             </a:r>
           </a:p>
@@ -1703,38 +1704,37 @@
           <a:p>
             <a:pPr lvl="0"/>
             <a:r>
-              <a:rPr lang="en-US" smtClean="0"/>
+              <a:rPr lang="en-US"/>
               <a:t>Click to edit Master text styles</a:t>
             </a:r>
           </a:p>
           <a:p>
             <a:pPr lvl="1"/>
             <a:r>
-              <a:rPr lang="en-US" smtClean="0"/>
+              <a:rPr lang="en-US"/>
               <a:t>Second level</a:t>
             </a:r>
           </a:p>
           <a:p>
             <a:pPr lvl="2"/>
             <a:r>
-              <a:rPr lang="en-US" smtClean="0"/>
+              <a:rPr lang="en-US"/>
               <a:t>Third level</a:t>
             </a:r>
           </a:p>
           <a:p>
             <a:pPr lvl="3"/>
             <a:r>
-              <a:rPr lang="en-US" smtClean="0"/>
+              <a:rPr lang="en-US"/>
               <a:t>Fourth level</a:t>
             </a:r>
           </a:p>
           <a:p>
             <a:pPr lvl="4"/>
             <a:r>
-              <a:rPr lang="en-US" smtClean="0"/>
+              <a:rPr lang="en-US"/>
               <a:t>Fifth level</a:t>
             </a:r>
-            <a:endParaRPr lang="en-US"/>
           </a:p>
         </p:txBody>
       </p:sp>
@@ -1756,7 +1756,7 @@
             <a:fld id="{1D8BD707-D9CF-40AE-B4C6-C98DA3205C09}" type="datetimeFigureOut">
               <a:rPr lang="en-US" smtClean="0"/>
               <a:pPr/>
-              <a:t>12/12/2022</a:t>
+              <a:t>6/15/2025</a:t>
             </a:fld>
             <a:endParaRPr lang="en-US"/>
           </a:p>
@@ -1846,10 +1846,9 @@
           <a:lstStyle/>
           <a:p>
             <a:r>
-              <a:rPr lang="en-US" smtClean="0"/>
+              <a:rPr lang="en-US"/>
               <a:t>Click to edit Master title style</a:t>
             </a:r>
-            <a:endParaRPr lang="en-US"/>
           </a:p>
         </p:txBody>
       </p:sp>
@@ -1871,7 +1870,7 @@
             <a:fld id="{1D8BD707-D9CF-40AE-B4C6-C98DA3205C09}" type="datetimeFigureOut">
               <a:rPr lang="en-US" smtClean="0"/>
               <a:pPr/>
-              <a:t>12/12/2022</a:t>
+              <a:t>6/15/2025</a:t>
             </a:fld>
             <a:endParaRPr lang="en-US"/>
           </a:p>
@@ -1963,7 +1962,7 @@
             <a:fld id="{1D8BD707-D9CF-40AE-B4C6-C98DA3205C09}" type="datetimeFigureOut">
               <a:rPr lang="en-US" smtClean="0"/>
               <a:pPr/>
-              <a:t>12/12/2022</a:t>
+              <a:t>6/15/2025</a:t>
             </a:fld>
             <a:endParaRPr lang="en-US"/>
           </a:p>
@@ -2062,10 +2061,9 @@
           </a:lstStyle>
           <a:p>
             <a:r>
-              <a:rPr lang="en-US" smtClean="0"/>
+              <a:rPr lang="en-US"/>
               <a:t>Click to edit Master title style</a:t>
             </a:r>
-            <a:endParaRPr lang="en-US"/>
           </a:p>
         </p:txBody>
       </p:sp>
@@ -2119,38 +2117,37 @@
           <a:p>
             <a:pPr lvl="0"/>
             <a:r>
-              <a:rPr lang="en-US" smtClean="0"/>
+              <a:rPr lang="en-US"/>
               <a:t>Click to edit Master text styles</a:t>
             </a:r>
           </a:p>
           <a:p>
             <a:pPr lvl="1"/>
             <a:r>
-              <a:rPr lang="en-US" smtClean="0"/>
+              <a:rPr lang="en-US"/>
               <a:t>Second level</a:t>
             </a:r>
           </a:p>
           <a:p>
             <a:pPr lvl="2"/>
             <a:r>
-              <a:rPr lang="en-US" smtClean="0"/>
+              <a:rPr lang="en-US"/>
               <a:t>Third level</a:t>
             </a:r>
           </a:p>
           <a:p>
             <a:pPr lvl="3"/>
             <a:r>
-              <a:rPr lang="en-US" smtClean="0"/>
+              <a:rPr lang="en-US"/>
               <a:t>Fourth level</a:t>
             </a:r>
           </a:p>
           <a:p>
             <a:pPr lvl="4"/>
             <a:r>
-              <a:rPr lang="en-US" smtClean="0"/>
+              <a:rPr lang="en-US"/>
               <a:t>Fifth level</a:t>
             </a:r>
-            <a:endParaRPr lang="en-US"/>
           </a:p>
         </p:txBody>
       </p:sp>
@@ -2213,7 +2210,7 @@
           <a:p>
             <a:pPr lvl="0"/>
             <a:r>
-              <a:rPr lang="en-US" smtClean="0"/>
+              <a:rPr lang="en-US"/>
               <a:t>Click to edit Master text styles</a:t>
             </a:r>
           </a:p>
@@ -2237,7 +2234,7 @@
             <a:fld id="{1D8BD707-D9CF-40AE-B4C6-C98DA3205C09}" type="datetimeFigureOut">
               <a:rPr lang="en-US" smtClean="0"/>
               <a:pPr/>
-              <a:t>12/12/2022</a:t>
+              <a:t>6/15/2025</a:t>
             </a:fld>
             <a:endParaRPr lang="en-US"/>
           </a:p>
@@ -2336,10 +2333,9 @@
           </a:lstStyle>
           <a:p>
             <a:r>
-              <a:rPr lang="en-US" smtClean="0"/>
+              <a:rPr lang="en-US"/>
               <a:t>Click to edit Master title style</a:t>
             </a:r>
-            <a:endParaRPr lang="en-US"/>
           </a:p>
         </p:txBody>
       </p:sp>
@@ -2463,7 +2459,7 @@
           <a:p>
             <a:pPr lvl="0"/>
             <a:r>
-              <a:rPr lang="en-US" smtClean="0"/>
+              <a:rPr lang="en-US"/>
               <a:t>Click to edit Master text styles</a:t>
             </a:r>
           </a:p>
@@ -2487,7 +2483,7 @@
             <a:fld id="{1D8BD707-D9CF-40AE-B4C6-C98DA3205C09}" type="datetimeFigureOut">
               <a:rPr lang="en-US" smtClean="0"/>
               <a:pPr/>
-              <a:t>12/12/2022</a:t>
+              <a:t>6/15/2025</a:t>
             </a:fld>
             <a:endParaRPr lang="en-US"/>
           </a:p>
@@ -2592,10 +2588,9 @@
           <a:lstStyle/>
           <a:p>
             <a:r>
-              <a:rPr lang="en-US" smtClean="0"/>
+              <a:rPr lang="en-US"/>
               <a:t>Click to edit Master title style</a:t>
             </a:r>
-            <a:endParaRPr lang="en-US"/>
           </a:p>
         </p:txBody>
       </p:sp>
@@ -2626,38 +2621,37 @@
           <a:p>
             <a:pPr lvl="0"/>
             <a:r>
-              <a:rPr lang="en-US" smtClean="0"/>
+              <a:rPr lang="en-US"/>
               <a:t>Click to edit Master text styles</a:t>
             </a:r>
           </a:p>
           <a:p>
             <a:pPr lvl="1"/>
             <a:r>
-              <a:rPr lang="en-US" smtClean="0"/>
+              <a:rPr lang="en-US"/>
               <a:t>Second level</a:t>
             </a:r>
           </a:p>
           <a:p>
             <a:pPr lvl="2"/>
             <a:r>
-              <a:rPr lang="en-US" smtClean="0"/>
+              <a:rPr lang="en-US"/>
               <a:t>Third level</a:t>
             </a:r>
           </a:p>
           <a:p>
             <a:pPr lvl="3"/>
             <a:r>
-              <a:rPr lang="en-US" smtClean="0"/>
+              <a:rPr lang="en-US"/>
               <a:t>Fourth level</a:t>
             </a:r>
           </a:p>
           <a:p>
             <a:pPr lvl="4"/>
             <a:r>
-              <a:rPr lang="en-US" smtClean="0"/>
+              <a:rPr lang="en-US"/>
               <a:t>Fifth level</a:t>
             </a:r>
-            <a:endParaRPr lang="en-US"/>
           </a:p>
         </p:txBody>
       </p:sp>
@@ -2697,7 +2691,7 @@
             <a:fld id="{1D8BD707-D9CF-40AE-B4C6-C98DA3205C09}" type="datetimeFigureOut">
               <a:rPr lang="en-US" smtClean="0"/>
               <a:pPr/>
-              <a:t>12/12/2022</a:t>
+              <a:t>6/15/2025</a:t>
             </a:fld>
             <a:endParaRPr lang="en-US"/>
           </a:p>
@@ -3124,68 +3118,43 @@
           <a:lstStyle/>
           <a:p>
             <a:r>
-              <a:rPr lang="en-IN" sz="3300" dirty="0" smtClean="0"/>
+              <a:rPr lang="en-IN" sz="3300" dirty="0"/>
               <a:t>Example :</a:t>
             </a:r>
           </a:p>
           <a:p>
             <a:r>
-              <a:rPr lang="en-IN" sz="3300" dirty="0" smtClean="0"/>
+              <a:rPr lang="en-IN" sz="3300" dirty="0"/>
               <a:t>Gmail application</a:t>
             </a:r>
           </a:p>
           <a:p>
             <a:r>
-              <a:rPr lang="en-IN" sz="3300" dirty="0" smtClean="0"/>
+              <a:rPr lang="en-IN" sz="3300" dirty="0"/>
               <a:t>Login screen (page1)</a:t>
             </a:r>
           </a:p>
           <a:p>
             <a:r>
-              <a:rPr lang="en-IN" sz="3300" dirty="0" smtClean="0"/>
+              <a:rPr lang="en-IN" sz="3300" dirty="0"/>
               <a:t>Inbox(page2)</a:t>
             </a:r>
           </a:p>
           <a:p>
             <a:r>
-              <a:rPr lang="en-IN" sz="3300" dirty="0" smtClean="0"/>
+              <a:rPr lang="en-IN" sz="3300" dirty="0"/>
               <a:t>Assume Some copied URL of page2</a:t>
             </a:r>
           </a:p>
           <a:p>
             <a:r>
-              <a:rPr lang="en-IN" sz="3300" dirty="0" smtClean="0"/>
+              <a:rPr lang="en-IN" sz="3300" dirty="0"/>
               <a:t>It redirects to home page</a:t>
             </a:r>
             <a:endParaRPr lang="en-US" sz="3300" dirty="0"/>
           </a:p>
         </p:txBody>
       </p:sp>
-    </p:spTree>
-  </p:cSld>
-  <p:clrMapOvr>
-    <a:masterClrMapping/>
-  </p:clrMapOvr>
-</p:sld>
-</file>
-
-<file path=ppt/slides/slide10.xml><?xml version="1.0" encoding="utf-8"?>
-<p:sld xmlns:a="http://schemas.openxmlformats.org/drawingml/2006/main" xmlns:r="http://schemas.openxmlformats.org/officeDocument/2006/relationships" xmlns:p="http://schemas.openxmlformats.org/presentationml/2006/main">
-  <p:cSld>
-    <p:spTree>
-      <p:nvGrpSpPr>
-        <p:cNvPr id="1" name=""/>
-        <p:cNvGrpSpPr/>
-        <p:nvPr/>
-      </p:nvGrpSpPr>
-      <p:grpSpPr>
-        <a:xfrm>
-          <a:off x="0" y="0"/>
-          <a:ext cx="0" cy="0"/>
-          <a:chOff x="0" y="0"/>
-          <a:chExt cx="0" cy="0"/>
-        </a:xfrm>
-      </p:grpSpPr>
     </p:spTree>
   </p:cSld>
   <p:clrMapOvr>
@@ -3325,7 +3294,7 @@
           <a:lstStyle/>
           <a:p>
             <a:r>
-              <a:rPr lang="en-IN" dirty="0" smtClean="0"/>
+              <a:rPr lang="en-IN" dirty="0"/>
               <a:t>(Previous page)</a:t>
             </a:r>
             <a:endParaRPr lang="en-US" dirty="0"/>
@@ -3380,61 +3349,61 @@
           <a:lstStyle/>
           <a:p>
             <a:r>
-              <a:rPr lang="en-IN" sz="2500" dirty="0" smtClean="0"/>
+              <a:rPr lang="en-IN" sz="2500" dirty="0"/>
               <a:t>In order to track the session if you are going for hidden form  fields.</a:t>
             </a:r>
           </a:p>
           <a:p>
             <a:r>
-              <a:rPr lang="en-IN" sz="2500" dirty="0" smtClean="0"/>
+              <a:rPr lang="en-IN" sz="2500" dirty="0"/>
               <a:t>Hidden form  fields means not visible to the user</a:t>
             </a:r>
           </a:p>
           <a:p>
-            <a:endParaRPr lang="en-IN" sz="2500" dirty="0" smtClean="0"/>
-          </a:p>
-          <a:p>
-            <a:r>
-              <a:rPr lang="en-IN" sz="2500" dirty="0" smtClean="0"/>
+            <a:endParaRPr lang="en-IN" sz="2500" dirty="0"/>
+          </a:p>
+          <a:p>
+            <a:r>
+              <a:rPr lang="en-IN" sz="2500" dirty="0"/>
               <a:t>Session tracking needs to be done with out knowing to the user</a:t>
             </a:r>
           </a:p>
           <a:p>
-            <a:endParaRPr lang="en-IN" sz="2500" dirty="0" smtClean="0"/>
-          </a:p>
-          <a:p>
-            <a:r>
-              <a:rPr lang="en-IN" sz="2500" dirty="0" smtClean="0"/>
+            <a:endParaRPr lang="en-IN" sz="2500" dirty="0"/>
+          </a:p>
+          <a:p>
+            <a:r>
+              <a:rPr lang="en-IN" sz="2500" dirty="0"/>
               <a:t>In page 1 we create one hidden filed  which is not visible to user , then when we connect from page 1 to page 2.</a:t>
             </a:r>
           </a:p>
           <a:p>
             <a:r>
-              <a:rPr lang="en-IN" sz="2500" dirty="0" smtClean="0"/>
+              <a:rPr lang="en-IN" sz="2500" dirty="0"/>
               <a:t> in page 2 we read the value of hidden field</a:t>
             </a:r>
           </a:p>
           <a:p>
-            <a:endParaRPr lang="en-IN" sz="2500" dirty="0" smtClean="0"/>
-          </a:p>
-          <a:p>
-            <a:r>
-              <a:rPr lang="en-IN" sz="2500" dirty="0" smtClean="0"/>
+            <a:endParaRPr lang="en-IN" sz="2500" dirty="0"/>
+          </a:p>
+          <a:p>
+            <a:r>
+              <a:rPr lang="en-IN" sz="2500" dirty="0"/>
               <a:t>So in page 2 if you are able to read the value of hidden field indicates that you are coming from page 1.</a:t>
             </a:r>
           </a:p>
           <a:p>
-            <a:endParaRPr lang="en-IN" sz="2500" dirty="0" smtClean="0"/>
-          </a:p>
-          <a:p>
-            <a:r>
-              <a:rPr lang="en-IN" sz="2500" dirty="0" smtClean="0"/>
+            <a:endParaRPr lang="en-IN" sz="2500" dirty="0"/>
+          </a:p>
+          <a:p>
+            <a:r>
+              <a:rPr lang="en-IN" sz="2500" dirty="0"/>
               <a:t>If you are not coming from page1 if you open page 2 directly , then can you able to read the value of hidden filed ? NO</a:t>
             </a:r>
           </a:p>
           <a:p>
             <a:r>
-              <a:rPr lang="en-IN" sz="2500" dirty="0" smtClean="0"/>
+              <a:rPr lang="en-IN" sz="2500" dirty="0"/>
               <a:t>So we can say invalid session if some one access page 2 directly </a:t>
             </a:r>
             <a:endParaRPr lang="en-US" sz="2500" dirty="0"/>
